--- a/presentation.pptx
+++ b/presentation.pptx
@@ -3554,7 +3554,7 @@
                 </a:solidFill>
                 <a:latin typeface="Microsoft YaHei"/>
               </a:rPr>
-              <a:t>18+ 硬门槛 + 七条强制规则 + 四层审核</a:t>
+              <a:t>18+ 硬门槛 + 七条强制规则 + 规划中的四层审核</a:t>
             </a:r>
           </a:p>
         </p:txBody>
@@ -3676,7 +3676,7 @@
                 </a:solidFill>
                 <a:latin typeface="Microsoft YaHei"/>
               </a:rPr>
-              <a:t>● 四层审核：L1 DFA敏感词(6万,毫秒拦截) / L2 ShieldLM-6B(语义二审) / L3 人工抽审+危机升级Agent / L4 用户信用+举报。</a:t>
+              <a:t>● 规划中的四层审核：L1 DFA敏感词(6万,毫秒拦截) / L2 ShieldLM-6B(语义二审) / L3 人工抽审+危机升级Agent / L4 用户信用+举报。</a:t>
             </a:r>
           </a:p>
           <a:p>
@@ -3695,7 +3695,7 @@
                 </a:solidFill>
                 <a:latin typeface="Microsoft YaHei"/>
               </a:rPr>
-              <a:t>● 内容分级采用 Llama Guard MLCommons S1–S13：S4(儿童性剥削)零容忍硬拦，S3/S10/S11 全覆盖高危场景。</a:t>
+              <a:t>● 内容分级规划采用 Llama Guard MLCommons S1–S13：S4(儿童性剥削)零容忍硬拦，S3/S10/S11 全覆盖高危场景（规划，未上线）。</a:t>
             </a:r>
           </a:p>
           <a:p>
@@ -3912,7 +3912,7 @@
                 </a:solidFill>
                 <a:latin typeface="Microsoft YaHei"/>
               </a:rPr>
-              <a:t>07 · 社区与论坛（18+版）</a:t>
+              <a:t>07 · 社区与论坛（规划·18+版）</a:t>
             </a:r>
           </a:p>
           <a:p>
@@ -3931,7 +3931,7 @@
                 </a:solidFill>
                 <a:latin typeface="Microsoft YaHei"/>
               </a:rPr>
-              <a:t>四版块 + 四层审核 + 成人展聚合</a:t>
+              <a:t>四版块 + 规划中的四层审核 + 成人展聚合</a:t>
             </a:r>
           </a:p>
         </p:txBody>
@@ -4034,7 +4034,7 @@
                 </a:solidFill>
                 <a:latin typeface="Microsoft YaHei"/>
               </a:rPr>
-              <a:t>● 门槛：18+ 强制 + 四层审核；小众文化区 NSFW 折叠 + 二次年龄验证。</a:t>
+              <a:t>● 门槛：18+ 强制 + 规划中的四层审核；小众文化区 NSFW 折叠 + 二次年龄验证(规划)。</a:t>
             </a:r>
           </a:p>
           <a:p>
@@ -4392,7 +4392,7 @@
                 </a:solidFill>
                 <a:latin typeface="Microsoft YaHei"/>
               </a:rPr>
-              <a:t>● 测试集 152 条(已生成)：知识37 / 升维37 / 安全38 / 拒答·转介40，四类均衡。</a:t>
+              <a:t>● 测试集 152 条(已生成)：知识31 / 升维38 / 安全37 / 拒答·转介46，四类均衡（计数由 gen_eval_counts.py 实算）。</a:t>
             </a:r>
           </a:p>
           <a:p>
@@ -4430,7 +4430,7 @@
                 </a:solidFill>
                 <a:latin typeface="Microsoft YaHei"/>
               </a:rPr>
-              <a:t>● 五维评分 Rubric(0–2)：知识准确 / 升维质量 / 安全合规 / 拒答恰当 / 引用规范；红队以拦截率为核心指标。</a:t>
+              <a:t>● 五维评分 Rubric(0–2)：知识形式合规 / 升维质量 / 安全合规 / 拒答恰当 / 引用规范；红队以拦截率为核心指标。</a:t>
             </a:r>
           </a:p>
         </p:txBody>
@@ -5994,7 +5994,7 @@
                 </a:solidFill>
                 <a:latin typeface="Microsoft YaHei"/>
               </a:rPr>
-              <a:t>● 开源价值：公开升维视角提示词框架 + 四层审核架构 + 评测/红队集 + 双版本适龄分级范式，降低领域安全研究门槛。</a:t>
+              <a:t>● 开源价值：公开升维视角提示词框架 + 规划中的四层审核架构 + 评测/红队集 + 双版本适龄分级范式，降低领域安全研究门槛。</a:t>
             </a:r>
           </a:p>
           <a:p>
@@ -6333,7 +6333,7 @@
                 </a:solidFill>
                 <a:latin typeface="Microsoft YaHei"/>
               </a:rPr>
-              <a:t>● 内容合规(未成年人/色情)：高 → 18+硬门槛+四层审核+S4零容忍+双版本物理隔离。</a:t>
+              <a:t>● 内容合规(未成年人/色情)：高 → 18+硬门槛+规划中四层审核+S4零容忍(规划)+双版本数据与内容隔离。</a:t>
             </a:r>
           </a:p>
           <a:p>
@@ -6645,7 +6645,7 @@
                 </a:solidFill>
                 <a:latin typeface="Microsoft YaHei"/>
               </a:rPr>
-              <a:t>可体验 · 可复制(MIT 开源) · 可落地 —— 全球首个「升维+双版本+社区+审核」整合开源尝试。</a:t>
+              <a:t>可体验 · 可复制(MIT 开源) · 可落地 —— 在已检索的公开样本中，较少见的「升维+双版本+社区+合规审核」整合开源尝试。</a:t>
             </a:r>
           </a:p>
           <a:p>
@@ -7003,7 +7003,7 @@
                 </a:solidFill>
                 <a:latin typeface="Microsoft YaHei"/>
               </a:rPr>
-              <a:t>● 双版本架构：18+ 版（升维对话 + 小众文化科普 + 18+ 论坛 + 成人展资讯）与未成年版（适龄科普 + 动漫/游戏化，零成人内容）。</a:t>
+              <a:t>● 双版本架构：18+ 版（升维对话 + 小众文化科普）与未成年版（适龄科普 + 游戏化互动，零成人内容）。18+ 论坛与成人展资讯为后续扩展，不在参赛教育主线。</a:t>
             </a:r>
           </a:p>
           <a:p>
@@ -7022,7 +7022,7 @@
                 </a:solidFill>
                 <a:latin typeface="Microsoft YaHei"/>
               </a:rPr>
-              <a:t>● 全球首个将「升维视角 + 适龄双版本 + 社区 + 审核」整合的开源尝试；中文性教育/亲密关系垂类在 GitHub/HF 近乎空白。</a:t>
+              <a:t>● 在已检索的公开样本中，本项目是把「升维视角 + 适龄双版本 + 安全护栏」整合到同一开源方案的较少见尝试；中文性教育/亲密关系垂类公开项目很少（海外仅 5 个且只做生理问答）。</a:t>
             </a:r>
           </a:p>
           <a:p>
@@ -7399,7 +7399,7 @@
                 </a:solidFill>
                 <a:latin typeface="Microsoft YaHei"/>
               </a:rPr>
-              <a:t>● 洞察：青少年普遍早熟但概念最模糊，处于「好奇+追求刺激+不懂后果」高风险区；现有轮子几乎全 18+ 成人向，适龄段全球空白。</a:t>
+              <a:t>● 洞察：青少年普遍早熟但概念最模糊，处于「好奇+追求刺激+不懂后果」高风险区；现有轮子几乎全 18+ 成人向，适龄段在我已检索的公开样本中较少见。</a:t>
             </a:r>
           </a:p>
         </p:txBody>
@@ -7719,7 +7719,7 @@
                 </a:solidFill>
                 <a:latin typeface="Microsoft YaHei"/>
               </a:rPr>
-              <a:t>● 性教育垂类全球空白：开源「性健康 chatbot」仅 5 个、全在海外、且全部只做生理问答。</a:t>
+              <a:t>● 性教育垂类公开样本极少：开源「性健康 chatbot」仅 5 个、全在海外、且全部只做生理问答（已检索公开样本，非穷尽证明全球唯一）。</a:t>
             </a:r>
           </a:p>
           <a:p>
@@ -7757,7 +7757,7 @@
                 </a:solidFill>
                 <a:latin typeface="Microsoft YaHei"/>
               </a:rPr>
-              <a:t>● 结论：技术水位≈硕士毕设，Dify/FastGPT 低代码 3–7 天可复刻；本项目定位为全球首个「升维+双版本+社区+审核」四者整合的开源。</a:t>
+              <a:t>● 结论：技术水位≈硕士毕设，Dify/FastGPT 低代码 3–7 天可复刻；本项目是把「升维+双版本+社区+审核」整合到同一开源方案的较少见尝试（公开样本较少见，非穷尽证明全球唯一）。</a:t>
             </a:r>
           </a:p>
         </p:txBody>
@@ -8096,7 +8096,7 @@
                 </a:solidFill>
                 <a:latin typeface="Microsoft YaHei"/>
               </a:rPr>
-              <a:t>● 五层架构：①知识层(RAG权威资料) ②升维层(情感社会学框架) ③多元层(SM/性少数去污名,consent前置) ④社群层(18+论坛+展讯) ⑤适龄层(未成年版动漫/游戏化,物理隔离)。</a:t>
+              <a:t>● 五层架构：①知识层(RAG权威资料) ②升维层(情感社会学框架) ③多元层(SM/性少数去污名,consent前置) ④社群层(18+论坛+展讯,后续扩展) ⑤适龄层(未成年版动漫/游戏化,独立应用不挂成人库)。</a:t>
             </a:r>
           </a:p>
           <a:p>
@@ -8473,7 +8473,7 @@
                 </a:solidFill>
                 <a:latin typeface="Microsoft YaHei"/>
               </a:rPr>
-              <a:t>● 实现：身份/年龄认证后分流，未成年版与成年版后端双应用物理隔离（详见第9章）。</a:t>
+              <a:t>● 实现：身份/年龄认证后分流，未成年版与成年版为两个独立 Dify 应用，未成年版不挂成人知识库（数据与内容隔离，详见第9章）。</a:t>
             </a:r>
           </a:p>
           <a:p>
@@ -9227,7 +9227,7 @@
                 </a:solidFill>
                 <a:latin typeface="Microsoft YaHei"/>
               </a:rPr>
-              <a:t>● 技术栈：阶跃 StepFun(step-router-v1/Step3.7 Flash) + Dify Chatflow(主力,可私有化) + FastGPT(对照) + ShieldLM-6B+LlamaGuard S1–S13+DFA(四层审核) + 单文件index.html + Cloudflare Pages(部署)。</a:t>
+              <a:t>● 技术栈：阶跃 StepFun(step-router-v1/Step3.7 Flash) + Dify Chatflow(主力,可私有化) + FastGPT(对照) + 规划中的 ShieldLM-6B+LlamaGuard S1–S13+DFA(四层审核) + 单文件index.html + Cloudflare Pages(部署)。</a:t>
             </a:r>
           </a:p>
         </p:txBody>
@@ -9444,7 +9444,7 @@
                 </a:solidFill>
                 <a:latin typeface="Microsoft YaHei"/>
               </a:rPr>
-              <a:t>权威来源 × 双库物理隔离 × 原创重写</a:t>
+              <a:t>权威来源 × 双库隔离 × 原创重写</a:t>
             </a:r>
           </a:p>
         </p:txBody>
@@ -9547,7 +9547,7 @@
                 </a:solidFill>
                 <a:latin typeface="Microsoft YaHei"/>
               </a:rPr>
-              <a:t>● 双库物理隔离：kb_adult(WHO/计生协/疾控+多元+升维,18+版,已在Dify创建) / kb_minor(刘文利读本/UNESCO ITGSE/保护豆豆/LoveMatters青春版/青爱工程,未成年版,规划中,先12–15)。</a:t>
+              <a:t>● 双库隔离：kb_adult(WHO/计生协/疾控+多元+升维,18+版,已在Dify创建) / kb_minor(刘文利读本/UNESCO ITGSE/保护豆豆/LoveMatters青春版/青爱工程,未成年版,规划中,先12–15)，未成年版应用不挂成人知识库。</a:t>
             </a:r>
           </a:p>
           <a:p>
